--- a/submission/Mercury_SIH2026_Presentation.pptx
+++ b/submission/Mercury_SIH2026_Presentation.pptx
@@ -11803,7 +11803,7 @@
                 </a:solidFill>
                 <a:latin typeface="Arial"/>
               </a:rPr>
-              <a:t>Next.js 15 — App Router</a:t>
+              <a:t>Next.js 16 — App Router</a:t>
             </a:r>
           </a:p>
         </p:txBody>
